--- a/documentation/OurGreatMeals_Presentation.pptx
+++ b/documentation/OurGreatMeals_Presentation.pptx
@@ -5,16 +5,16 @@
     <p:sldMasterId id="2147483648" r:id="rId1"/>
   </p:sldMasterIdLst>
   <p:sldIdLst>
-    <p:sldId id="256" r:id="rId7"/>
-    <p:sldId id="257" r:id="rId8"/>
-    <p:sldId id="258" r:id="rId9"/>
-    <p:sldId id="259" r:id="rId10"/>
-    <p:sldId id="260" r:id="rId11"/>
-    <p:sldId id="261" r:id="rId12"/>
-    <p:sldId id="262" r:id="rId13"/>
-    <p:sldId id="263" r:id="rId14"/>
+    <p:sldId id="256" r:id="rId2"/>
+    <p:sldId id="257" r:id="rId3"/>
+    <p:sldId id="258" r:id="rId4"/>
+    <p:sldId id="259" r:id="rId5"/>
+    <p:sldId id="260" r:id="rId6"/>
+    <p:sldId id="261" r:id="rId7"/>
+    <p:sldId id="262" r:id="rId8"/>
+    <p:sldId id="263" r:id="rId9"/>
   </p:sldIdLst>
-  <p:sldSz cx="12188952" cy="6858000" type="screen4x3"/>
+  <p:sldSz cx="12188825" cy="6858000"/>
   <p:notesSz cx="6858000" cy="9144000"/>
   <p:defaultTextStyle>
     <a:defPPr>
@@ -111,6 +111,22 @@
       </a:defRPr>
     </a:lvl9pPr>
   </p:defaultTextStyle>
+  <p:extLst>
+    <p:ext uri="{EFAFB233-063F-42B5-8137-9DF3F51BA10A}">
+      <p15:sldGuideLst xmlns:p15="http://schemas.microsoft.com/office/powerpoint/2012/main">
+        <p15:guide id="1" orient="horz" pos="2160">
+          <p15:clr>
+            <a:srgbClr val="A4A3A4"/>
+          </p15:clr>
+        </p15:guide>
+        <p15:guide id="2" pos="2880">
+          <p15:clr>
+            <a:srgbClr val="A4A3A4"/>
+          </p15:clr>
+        </p15:guide>
+      </p15:sldGuideLst>
+    </p:ext>
+  </p:extLst>
 </p:presentation>
 </file>
 
@@ -152,10 +168,9 @@
           <a:lstStyle/>
           <a:p>
             <a:r>
-              <a:rPr lang="en-US" smtClean="0"/>
+              <a:rPr lang="en-US"/>
               <a:t>Click to edit Master title style</a:t>
             </a:r>
-            <a:endParaRPr lang="en-US"/>
           </a:p>
         </p:txBody>
       </p:sp>
@@ -271,10 +286,9 @@
           </a:lstStyle>
           <a:p>
             <a:r>
-              <a:rPr lang="en-US" smtClean="0"/>
+              <a:rPr lang="en-US"/>
               <a:t>Click to edit Master subtitle style</a:t>
             </a:r>
-            <a:endParaRPr lang="en-US"/>
           </a:p>
         </p:txBody>
       </p:sp>
@@ -295,7 +309,7 @@
           <a:p>
             <a:fld id="{5BCAD085-E8A6-8845-BD4E-CB4CCA059FC4}" type="datetimeFigureOut">
               <a:rPr lang="en-US" smtClean="0"/>
-              <a:t>1/27/13</a:t>
+              <a:t>4/14/26</a:t>
             </a:fld>
             <a:endParaRPr lang="en-US"/>
           </a:p>
@@ -389,10 +403,9 @@
           <a:lstStyle/>
           <a:p>
             <a:r>
-              <a:rPr lang="en-US" smtClean="0"/>
+              <a:rPr lang="en-US"/>
               <a:t>Click to edit Master title style</a:t>
             </a:r>
-            <a:endParaRPr lang="en-US"/>
           </a:p>
         </p:txBody>
       </p:sp>
@@ -413,38 +426,37 @@
           <a:p>
             <a:pPr lvl="0"/>
             <a:r>
-              <a:rPr lang="en-US" smtClean="0"/>
+              <a:rPr lang="en-US"/>
               <a:t>Click to edit Master text styles</a:t>
             </a:r>
           </a:p>
           <a:p>
             <a:pPr lvl="1"/>
             <a:r>
-              <a:rPr lang="en-US" smtClean="0"/>
+              <a:rPr lang="en-US"/>
               <a:t>Second level</a:t>
             </a:r>
           </a:p>
           <a:p>
             <a:pPr lvl="2"/>
             <a:r>
-              <a:rPr lang="en-US" smtClean="0"/>
+              <a:rPr lang="en-US"/>
               <a:t>Third level</a:t>
             </a:r>
           </a:p>
           <a:p>
             <a:pPr lvl="3"/>
             <a:r>
-              <a:rPr lang="en-US" smtClean="0"/>
+              <a:rPr lang="en-US"/>
               <a:t>Fourth level</a:t>
             </a:r>
           </a:p>
           <a:p>
             <a:pPr lvl="4"/>
             <a:r>
-              <a:rPr lang="en-US" smtClean="0"/>
+              <a:rPr lang="en-US"/>
               <a:t>Fifth level</a:t>
             </a:r>
-            <a:endParaRPr lang="en-US"/>
           </a:p>
         </p:txBody>
       </p:sp>
@@ -465,7 +477,7 @@
           <a:p>
             <a:fld id="{5BCAD085-E8A6-8845-BD4E-CB4CCA059FC4}" type="datetimeFigureOut">
               <a:rPr lang="en-US" smtClean="0"/>
-              <a:t>1/27/13</a:t>
+              <a:t>4/14/26</a:t>
             </a:fld>
             <a:endParaRPr lang="en-US"/>
           </a:p>
@@ -564,10 +576,9 @@
           <a:lstStyle/>
           <a:p>
             <a:r>
-              <a:rPr lang="en-US" smtClean="0"/>
+              <a:rPr lang="en-US"/>
               <a:t>Click to edit Master title style</a:t>
             </a:r>
-            <a:endParaRPr lang="en-US"/>
           </a:p>
         </p:txBody>
       </p:sp>
@@ -593,38 +604,37 @@
           <a:p>
             <a:pPr lvl="0"/>
             <a:r>
-              <a:rPr lang="en-US" smtClean="0"/>
+              <a:rPr lang="en-US"/>
               <a:t>Click to edit Master text styles</a:t>
             </a:r>
           </a:p>
           <a:p>
             <a:pPr lvl="1"/>
             <a:r>
-              <a:rPr lang="en-US" smtClean="0"/>
+              <a:rPr lang="en-US"/>
               <a:t>Second level</a:t>
             </a:r>
           </a:p>
           <a:p>
             <a:pPr lvl="2"/>
             <a:r>
-              <a:rPr lang="en-US" smtClean="0"/>
+              <a:rPr lang="en-US"/>
               <a:t>Third level</a:t>
             </a:r>
           </a:p>
           <a:p>
             <a:pPr lvl="3"/>
             <a:r>
-              <a:rPr lang="en-US" smtClean="0"/>
+              <a:rPr lang="en-US"/>
               <a:t>Fourth level</a:t>
             </a:r>
           </a:p>
           <a:p>
             <a:pPr lvl="4"/>
             <a:r>
-              <a:rPr lang="en-US" smtClean="0"/>
+              <a:rPr lang="en-US"/>
               <a:t>Fifth level</a:t>
             </a:r>
-            <a:endParaRPr lang="en-US"/>
           </a:p>
         </p:txBody>
       </p:sp>
@@ -645,7 +655,7 @@
           <a:p>
             <a:fld id="{5BCAD085-E8A6-8845-BD4E-CB4CCA059FC4}" type="datetimeFigureOut">
               <a:rPr lang="en-US" smtClean="0"/>
-              <a:t>1/27/13</a:t>
+              <a:t>4/14/26</a:t>
             </a:fld>
             <a:endParaRPr lang="en-US"/>
           </a:p>
@@ -739,10 +749,9 @@
           <a:lstStyle/>
           <a:p>
             <a:r>
-              <a:rPr lang="en-US" smtClean="0"/>
+              <a:rPr lang="en-US"/>
               <a:t>Click to edit Master title style</a:t>
             </a:r>
-            <a:endParaRPr lang="en-US"/>
           </a:p>
         </p:txBody>
       </p:sp>
@@ -763,38 +772,37 @@
           <a:p>
             <a:pPr lvl="0"/>
             <a:r>
-              <a:rPr lang="en-US" smtClean="0"/>
+              <a:rPr lang="en-US"/>
               <a:t>Click to edit Master text styles</a:t>
             </a:r>
           </a:p>
           <a:p>
             <a:pPr lvl="1"/>
             <a:r>
-              <a:rPr lang="en-US" smtClean="0"/>
+              <a:rPr lang="en-US"/>
               <a:t>Second level</a:t>
             </a:r>
           </a:p>
           <a:p>
             <a:pPr lvl="2"/>
             <a:r>
-              <a:rPr lang="en-US" smtClean="0"/>
+              <a:rPr lang="en-US"/>
               <a:t>Third level</a:t>
             </a:r>
           </a:p>
           <a:p>
             <a:pPr lvl="3"/>
             <a:r>
-              <a:rPr lang="en-US" smtClean="0"/>
+              <a:rPr lang="en-US"/>
               <a:t>Fourth level</a:t>
             </a:r>
           </a:p>
           <a:p>
             <a:pPr lvl="4"/>
             <a:r>
-              <a:rPr lang="en-US" smtClean="0"/>
+              <a:rPr lang="en-US"/>
               <a:t>Fifth level</a:t>
             </a:r>
-            <a:endParaRPr lang="en-US"/>
           </a:p>
         </p:txBody>
       </p:sp>
@@ -815,7 +823,7 @@
           <a:p>
             <a:fld id="{5BCAD085-E8A6-8845-BD4E-CB4CCA059FC4}" type="datetimeFigureOut">
               <a:rPr lang="en-US" smtClean="0"/>
-              <a:t>1/27/13</a:t>
+              <a:t>4/14/26</a:t>
             </a:fld>
             <a:endParaRPr lang="en-US"/>
           </a:p>
@@ -918,10 +926,9 @@
           </a:lstStyle>
           <a:p>
             <a:r>
-              <a:rPr lang="en-US" smtClean="0"/>
+              <a:rPr lang="en-US"/>
               <a:t>Click to edit Master title style</a:t>
             </a:r>
-            <a:endParaRPr lang="en-US"/>
           </a:p>
         </p:txBody>
       </p:sp>
@@ -1038,7 +1045,7 @@
           <a:p>
             <a:pPr lvl="0"/>
             <a:r>
-              <a:rPr lang="en-US" smtClean="0"/>
+              <a:rPr lang="en-US"/>
               <a:t>Click to edit Master text styles</a:t>
             </a:r>
           </a:p>
@@ -1061,7 +1068,7 @@
           <a:p>
             <a:fld id="{5BCAD085-E8A6-8845-BD4E-CB4CCA059FC4}" type="datetimeFigureOut">
               <a:rPr lang="en-US" smtClean="0"/>
-              <a:t>1/27/13</a:t>
+              <a:t>4/14/26</a:t>
             </a:fld>
             <a:endParaRPr lang="en-US"/>
           </a:p>
@@ -1155,10 +1162,9 @@
           <a:lstStyle/>
           <a:p>
             <a:r>
-              <a:rPr lang="en-US" smtClean="0"/>
+              <a:rPr lang="en-US"/>
               <a:t>Click to edit Master title style</a:t>
             </a:r>
-            <a:endParaRPr lang="en-US"/>
           </a:p>
         </p:txBody>
       </p:sp>
@@ -1212,38 +1218,37 @@
           <a:p>
             <a:pPr lvl="0"/>
             <a:r>
-              <a:rPr lang="en-US" smtClean="0"/>
+              <a:rPr lang="en-US"/>
               <a:t>Click to edit Master text styles</a:t>
             </a:r>
           </a:p>
           <a:p>
             <a:pPr lvl="1"/>
             <a:r>
-              <a:rPr lang="en-US" smtClean="0"/>
+              <a:rPr lang="en-US"/>
               <a:t>Second level</a:t>
             </a:r>
           </a:p>
           <a:p>
             <a:pPr lvl="2"/>
             <a:r>
-              <a:rPr lang="en-US" smtClean="0"/>
+              <a:rPr lang="en-US"/>
               <a:t>Third level</a:t>
             </a:r>
           </a:p>
           <a:p>
             <a:pPr lvl="3"/>
             <a:r>
-              <a:rPr lang="en-US" smtClean="0"/>
+              <a:rPr lang="en-US"/>
               <a:t>Fourth level</a:t>
             </a:r>
           </a:p>
           <a:p>
             <a:pPr lvl="4"/>
             <a:r>
-              <a:rPr lang="en-US" smtClean="0"/>
+              <a:rPr lang="en-US"/>
               <a:t>Fifth level</a:t>
             </a:r>
-            <a:endParaRPr lang="en-US"/>
           </a:p>
         </p:txBody>
       </p:sp>
@@ -1297,38 +1302,37 @@
           <a:p>
             <a:pPr lvl="0"/>
             <a:r>
-              <a:rPr lang="en-US" smtClean="0"/>
+              <a:rPr lang="en-US"/>
               <a:t>Click to edit Master text styles</a:t>
             </a:r>
           </a:p>
           <a:p>
             <a:pPr lvl="1"/>
             <a:r>
-              <a:rPr lang="en-US" smtClean="0"/>
+              <a:rPr lang="en-US"/>
               <a:t>Second level</a:t>
             </a:r>
           </a:p>
           <a:p>
             <a:pPr lvl="2"/>
             <a:r>
-              <a:rPr lang="en-US" smtClean="0"/>
+              <a:rPr lang="en-US"/>
               <a:t>Third level</a:t>
             </a:r>
           </a:p>
           <a:p>
             <a:pPr lvl="3"/>
             <a:r>
-              <a:rPr lang="en-US" smtClean="0"/>
+              <a:rPr lang="en-US"/>
               <a:t>Fourth level</a:t>
             </a:r>
           </a:p>
           <a:p>
             <a:pPr lvl="4"/>
             <a:r>
-              <a:rPr lang="en-US" smtClean="0"/>
+              <a:rPr lang="en-US"/>
               <a:t>Fifth level</a:t>
             </a:r>
-            <a:endParaRPr lang="en-US"/>
           </a:p>
         </p:txBody>
       </p:sp>
@@ -1349,7 +1353,7 @@
           <a:p>
             <a:fld id="{5BCAD085-E8A6-8845-BD4E-CB4CCA059FC4}" type="datetimeFigureOut">
               <a:rPr lang="en-US" smtClean="0"/>
-              <a:t>1/27/13</a:t>
+              <a:t>4/14/26</a:t>
             </a:fld>
             <a:endParaRPr lang="en-US"/>
           </a:p>
@@ -1447,10 +1451,9 @@
           </a:lstStyle>
           <a:p>
             <a:r>
-              <a:rPr lang="en-US" smtClean="0"/>
+              <a:rPr lang="en-US"/>
               <a:t>Click to edit Master title style</a:t>
             </a:r>
-            <a:endParaRPr lang="en-US"/>
           </a:p>
         </p:txBody>
       </p:sp>
@@ -1513,7 +1516,7 @@
           <a:p>
             <a:pPr lvl="0"/>
             <a:r>
-              <a:rPr lang="en-US" smtClean="0"/>
+              <a:rPr lang="en-US"/>
               <a:t>Click to edit Master text styles</a:t>
             </a:r>
           </a:p>
@@ -1569,38 +1572,37 @@
           <a:p>
             <a:pPr lvl="0"/>
             <a:r>
-              <a:rPr lang="en-US" smtClean="0"/>
+              <a:rPr lang="en-US"/>
               <a:t>Click to edit Master text styles</a:t>
             </a:r>
           </a:p>
           <a:p>
             <a:pPr lvl="1"/>
             <a:r>
-              <a:rPr lang="en-US" smtClean="0"/>
+              <a:rPr lang="en-US"/>
               <a:t>Second level</a:t>
             </a:r>
           </a:p>
           <a:p>
             <a:pPr lvl="2"/>
             <a:r>
-              <a:rPr lang="en-US" smtClean="0"/>
+              <a:rPr lang="en-US"/>
               <a:t>Third level</a:t>
             </a:r>
           </a:p>
           <a:p>
             <a:pPr lvl="3"/>
             <a:r>
-              <a:rPr lang="en-US" smtClean="0"/>
+              <a:rPr lang="en-US"/>
               <a:t>Fourth level</a:t>
             </a:r>
           </a:p>
           <a:p>
             <a:pPr lvl="4"/>
             <a:r>
-              <a:rPr lang="en-US" smtClean="0"/>
+              <a:rPr lang="en-US"/>
               <a:t>Fifth level</a:t>
             </a:r>
-            <a:endParaRPr lang="en-US"/>
           </a:p>
         </p:txBody>
       </p:sp>
@@ -1663,7 +1665,7 @@
           <a:p>
             <a:pPr lvl="0"/>
             <a:r>
-              <a:rPr lang="en-US" smtClean="0"/>
+              <a:rPr lang="en-US"/>
               <a:t>Click to edit Master text styles</a:t>
             </a:r>
           </a:p>
@@ -1719,38 +1721,37 @@
           <a:p>
             <a:pPr lvl="0"/>
             <a:r>
-              <a:rPr lang="en-US" smtClean="0"/>
+              <a:rPr lang="en-US"/>
               <a:t>Click to edit Master text styles</a:t>
             </a:r>
           </a:p>
           <a:p>
             <a:pPr lvl="1"/>
             <a:r>
-              <a:rPr lang="en-US" smtClean="0"/>
+              <a:rPr lang="en-US"/>
               <a:t>Second level</a:t>
             </a:r>
           </a:p>
           <a:p>
             <a:pPr lvl="2"/>
             <a:r>
-              <a:rPr lang="en-US" smtClean="0"/>
+              <a:rPr lang="en-US"/>
               <a:t>Third level</a:t>
             </a:r>
           </a:p>
           <a:p>
             <a:pPr lvl="3"/>
             <a:r>
-              <a:rPr lang="en-US" smtClean="0"/>
+              <a:rPr lang="en-US"/>
               <a:t>Fourth level</a:t>
             </a:r>
           </a:p>
           <a:p>
             <a:pPr lvl="4"/>
             <a:r>
-              <a:rPr lang="en-US" smtClean="0"/>
+              <a:rPr lang="en-US"/>
               <a:t>Fifth level</a:t>
             </a:r>
-            <a:endParaRPr lang="en-US"/>
           </a:p>
         </p:txBody>
       </p:sp>
@@ -1771,7 +1772,7 @@
           <a:p>
             <a:fld id="{5BCAD085-E8A6-8845-BD4E-CB4CCA059FC4}" type="datetimeFigureOut">
               <a:rPr lang="en-US" smtClean="0"/>
-              <a:t>1/27/13</a:t>
+              <a:t>4/14/26</a:t>
             </a:fld>
             <a:endParaRPr lang="en-US"/>
           </a:p>
@@ -1865,10 +1866,9 @@
           <a:lstStyle/>
           <a:p>
             <a:r>
-              <a:rPr lang="en-US" smtClean="0"/>
+              <a:rPr lang="en-US"/>
               <a:t>Click to edit Master title style</a:t>
             </a:r>
-            <a:endParaRPr lang="en-US"/>
           </a:p>
         </p:txBody>
       </p:sp>
@@ -1889,7 +1889,7 @@
           <a:p>
             <a:fld id="{5BCAD085-E8A6-8845-BD4E-CB4CCA059FC4}" type="datetimeFigureOut">
               <a:rPr lang="en-US" smtClean="0"/>
-              <a:t>1/27/13</a:t>
+              <a:t>4/14/26</a:t>
             </a:fld>
             <a:endParaRPr lang="en-US"/>
           </a:p>
@@ -1984,7 +1984,7 @@
           <a:p>
             <a:fld id="{5BCAD085-E8A6-8845-BD4E-CB4CCA059FC4}" type="datetimeFigureOut">
               <a:rPr lang="en-US" smtClean="0"/>
-              <a:t>1/27/13</a:t>
+              <a:t>4/14/26</a:t>
             </a:fld>
             <a:endParaRPr lang="en-US"/>
           </a:p>
@@ -2087,10 +2087,9 @@
           </a:lstStyle>
           <a:p>
             <a:r>
-              <a:rPr lang="en-US" smtClean="0"/>
+              <a:rPr lang="en-US"/>
               <a:t>Click to edit Master title style</a:t>
             </a:r>
-            <a:endParaRPr lang="en-US"/>
           </a:p>
         </p:txBody>
       </p:sp>
@@ -2144,38 +2143,37 @@
           <a:p>
             <a:pPr lvl="0"/>
             <a:r>
-              <a:rPr lang="en-US" smtClean="0"/>
+              <a:rPr lang="en-US"/>
               <a:t>Click to edit Master text styles</a:t>
             </a:r>
           </a:p>
           <a:p>
             <a:pPr lvl="1"/>
             <a:r>
-              <a:rPr lang="en-US" smtClean="0"/>
+              <a:rPr lang="en-US"/>
               <a:t>Second level</a:t>
             </a:r>
           </a:p>
           <a:p>
             <a:pPr lvl="2"/>
             <a:r>
-              <a:rPr lang="en-US" smtClean="0"/>
+              <a:rPr lang="en-US"/>
               <a:t>Third level</a:t>
             </a:r>
           </a:p>
           <a:p>
             <a:pPr lvl="3"/>
             <a:r>
-              <a:rPr lang="en-US" smtClean="0"/>
+              <a:rPr lang="en-US"/>
               <a:t>Fourth level</a:t>
             </a:r>
           </a:p>
           <a:p>
             <a:pPr lvl="4"/>
             <a:r>
-              <a:rPr lang="en-US" smtClean="0"/>
+              <a:rPr lang="en-US"/>
               <a:t>Fifth level</a:t>
             </a:r>
-            <a:endParaRPr lang="en-US"/>
           </a:p>
         </p:txBody>
       </p:sp>
@@ -2238,7 +2236,7 @@
           <a:p>
             <a:pPr lvl="0"/>
             <a:r>
-              <a:rPr lang="en-US" smtClean="0"/>
+              <a:rPr lang="en-US"/>
               <a:t>Click to edit Master text styles</a:t>
             </a:r>
           </a:p>
@@ -2261,7 +2259,7 @@
           <a:p>
             <a:fld id="{5BCAD085-E8A6-8845-BD4E-CB4CCA059FC4}" type="datetimeFigureOut">
               <a:rPr lang="en-US" smtClean="0"/>
-              <a:t>1/27/13</a:t>
+              <a:t>4/14/26</a:t>
             </a:fld>
             <a:endParaRPr lang="en-US"/>
           </a:p>
@@ -2364,10 +2362,9 @@
           </a:lstStyle>
           <a:p>
             <a:r>
-              <a:rPr lang="en-US" smtClean="0"/>
+              <a:rPr lang="en-US"/>
               <a:t>Click to edit Master title style</a:t>
             </a:r>
-            <a:endParaRPr lang="en-US"/>
           </a:p>
         </p:txBody>
       </p:sp>
@@ -2491,7 +2488,7 @@
           <a:p>
             <a:pPr lvl="0"/>
             <a:r>
-              <a:rPr lang="en-US" smtClean="0"/>
+              <a:rPr lang="en-US"/>
               <a:t>Click to edit Master text styles</a:t>
             </a:r>
           </a:p>
@@ -2514,7 +2511,7 @@
           <a:p>
             <a:fld id="{5BCAD085-E8A6-8845-BD4E-CB4CCA059FC4}" type="datetimeFigureOut">
               <a:rPr lang="en-US" smtClean="0"/>
-              <a:t>1/27/13</a:t>
+              <a:t>4/14/26</a:t>
             </a:fld>
             <a:endParaRPr lang="en-US"/>
           </a:p>
@@ -2623,10 +2620,9 @@
           <a:lstStyle/>
           <a:p>
             <a:r>
-              <a:rPr lang="en-US" smtClean="0"/>
+              <a:rPr lang="en-US"/>
               <a:t>Click to edit Master title style</a:t>
             </a:r>
-            <a:endParaRPr lang="en-US"/>
           </a:p>
         </p:txBody>
       </p:sp>
@@ -2657,38 +2653,37 @@
           <a:p>
             <a:pPr lvl="0"/>
             <a:r>
-              <a:rPr lang="en-US" smtClean="0"/>
+              <a:rPr lang="en-US"/>
               <a:t>Click to edit Master text styles</a:t>
             </a:r>
           </a:p>
           <a:p>
             <a:pPr lvl="1"/>
             <a:r>
-              <a:rPr lang="en-US" smtClean="0"/>
+              <a:rPr lang="en-US"/>
               <a:t>Second level</a:t>
             </a:r>
           </a:p>
           <a:p>
             <a:pPr lvl="2"/>
             <a:r>
-              <a:rPr lang="en-US" smtClean="0"/>
+              <a:rPr lang="en-US"/>
               <a:t>Third level</a:t>
             </a:r>
           </a:p>
           <a:p>
             <a:pPr lvl="3"/>
             <a:r>
-              <a:rPr lang="en-US" smtClean="0"/>
+              <a:rPr lang="en-US"/>
               <a:t>Fourth level</a:t>
             </a:r>
           </a:p>
           <a:p>
             <a:pPr lvl="4"/>
             <a:r>
-              <a:rPr lang="en-US" smtClean="0"/>
+              <a:rPr lang="en-US"/>
               <a:t>Fifth level</a:t>
             </a:r>
-            <a:endParaRPr lang="en-US"/>
           </a:p>
         </p:txBody>
       </p:sp>
@@ -2727,7 +2722,7 @@
           <a:p>
             <a:fld id="{5BCAD085-E8A6-8845-BD4E-CB4CCA059FC4}" type="datetimeFigureOut">
               <a:rPr lang="en-US" smtClean="0"/>
-              <a:t>1/27/13</a:t>
+              <a:t>4/14/26</a:t>
             </a:fld>
             <a:endParaRPr lang="en-US"/>
           </a:p>
@@ -3086,7 +3081,7 @@
 </file>
 
 <file path=ppt/slides/slide1.xml><?xml version="1.0" encoding="utf-8"?>
-<p:sld xmlns:a="http://schemas.openxmlformats.org/drawingml/2006/main" xmlns:p="http://schemas.openxmlformats.org/presentationml/2006/main" xmlns:r="http://schemas.openxmlformats.org/officeDocument/2006/relationships">
+<p:sld xmlns:a="http://schemas.openxmlformats.org/drawingml/2006/main" xmlns:r="http://schemas.openxmlformats.org/officeDocument/2006/relationships" xmlns:p="http://schemas.openxmlformats.org/presentationml/2006/main">
   <p:cSld>
     <p:bg>
       <p:bgPr>
@@ -3102,7 +3097,14 @@
         <p:cNvGrpSpPr/>
         <p:nvPr/>
       </p:nvGrpSpPr>
-      <p:grpSpPr/>
+      <p:grpSpPr>
+        <a:xfrm>
+          <a:off x="0" y="0"/>
+          <a:ext cx="0" cy="0"/>
+          <a:chOff x="0" y="0"/>
+          <a:chExt cx="0" cy="0"/>
+        </a:xfrm>
+      </p:grpSpPr>
       <p:sp>
         <p:nvSpPr>
           <p:cNvPr id="2" name="TextBox 1"/>
@@ -3211,6 +3213,7 @@
           <a:lstStyle/>
           <a:p>
             <a:pPr algn="ctr"/>
+            <a:endParaRPr/>
           </a:p>
         </p:txBody>
       </p:sp>
@@ -3256,6 +3259,7 @@
           <a:lstStyle/>
           <a:p>
             <a:pPr algn="ctr"/>
+            <a:endParaRPr/>
           </a:p>
         </p:txBody>
       </p:sp>
@@ -3335,6 +3339,7 @@
           <a:lstStyle/>
           <a:p>
             <a:pPr algn="ctr"/>
+            <a:endParaRPr/>
           </a:p>
         </p:txBody>
       </p:sp>
@@ -3414,6 +3419,7 @@
           <a:lstStyle/>
           <a:p>
             <a:pPr algn="ctr"/>
+            <a:endParaRPr/>
           </a:p>
         </p:txBody>
       </p:sp>
@@ -3493,6 +3499,7 @@
           <a:lstStyle/>
           <a:p>
             <a:pPr algn="ctr"/>
+            <a:endParaRPr/>
           </a:p>
         </p:txBody>
       </p:sp>
@@ -3572,6 +3579,7 @@
           <a:lstStyle/>
           <a:p>
             <a:pPr algn="ctr"/>
+            <a:endParaRPr/>
           </a:p>
         </p:txBody>
       </p:sp>
@@ -3651,6 +3659,7 @@
           <a:lstStyle/>
           <a:p>
             <a:pPr algn="ctr"/>
+            <a:endParaRPr/>
           </a:p>
         </p:txBody>
       </p:sp>
@@ -3731,7 +3740,7 @@
 </file>
 
 <file path=ppt/slides/slide2.xml><?xml version="1.0" encoding="utf-8"?>
-<p:sld xmlns:a="http://schemas.openxmlformats.org/drawingml/2006/main" xmlns:p="http://schemas.openxmlformats.org/presentationml/2006/main" xmlns:r="http://schemas.openxmlformats.org/officeDocument/2006/relationships">
+<p:sld xmlns:a="http://schemas.openxmlformats.org/drawingml/2006/main" xmlns:r="http://schemas.openxmlformats.org/officeDocument/2006/relationships" xmlns:p="http://schemas.openxmlformats.org/presentationml/2006/main">
   <p:cSld>
     <p:bg>
       <p:bgPr>
@@ -3747,7 +3756,14 @@
         <p:cNvGrpSpPr/>
         <p:nvPr/>
       </p:nvGrpSpPr>
-      <p:grpSpPr/>
+      <p:grpSpPr>
+        <a:xfrm>
+          <a:off x="0" y="0"/>
+          <a:ext cx="0" cy="0"/>
+          <a:chOff x="0" y="0"/>
+          <a:chExt cx="0" cy="0"/>
+        </a:xfrm>
+      </p:grpSpPr>
       <p:sp>
         <p:nvSpPr>
           <p:cNvPr id="2" name="TextBox 1"/>
@@ -3822,6 +3838,7 @@
           <a:lstStyle/>
           <a:p>
             <a:pPr algn="ctr"/>
+            <a:endParaRPr/>
           </a:p>
         </p:txBody>
       </p:sp>
@@ -3899,6 +3916,7 @@
           <a:lstStyle/>
           <a:p>
             <a:pPr algn="ctr"/>
+            <a:endParaRPr/>
           </a:p>
         </p:txBody>
       </p:sp>
@@ -4078,6 +4096,7 @@
           <a:lstStyle/>
           <a:p>
             <a:pPr algn="ctr"/>
+            <a:endParaRPr/>
           </a:p>
         </p:txBody>
       </p:sp>
@@ -4226,7 +4245,7 @@
 </file>
 
 <file path=ppt/slides/slide3.xml><?xml version="1.0" encoding="utf-8"?>
-<p:sld xmlns:a="http://schemas.openxmlformats.org/drawingml/2006/main" xmlns:p="http://schemas.openxmlformats.org/presentationml/2006/main" xmlns:r="http://schemas.openxmlformats.org/officeDocument/2006/relationships">
+<p:sld xmlns:a="http://schemas.openxmlformats.org/drawingml/2006/main" xmlns:r="http://schemas.openxmlformats.org/officeDocument/2006/relationships" xmlns:p="http://schemas.openxmlformats.org/presentationml/2006/main">
   <p:cSld>
     <p:bg>
       <p:bgPr>
@@ -4242,7 +4261,14 @@
         <p:cNvGrpSpPr/>
         <p:nvPr/>
       </p:nvGrpSpPr>
-      <p:grpSpPr/>
+      <p:grpSpPr>
+        <a:xfrm>
+          <a:off x="0" y="0"/>
+          <a:ext cx="0" cy="0"/>
+          <a:chOff x="0" y="0"/>
+          <a:chExt cx="0" cy="0"/>
+        </a:xfrm>
+      </p:grpSpPr>
       <p:sp>
         <p:nvSpPr>
           <p:cNvPr id="2" name="TextBox 1"/>
@@ -4317,6 +4343,7 @@
           <a:lstStyle/>
           <a:p>
             <a:pPr algn="ctr"/>
+            <a:endParaRPr/>
           </a:p>
         </p:txBody>
       </p:sp>
@@ -4396,6 +4423,7 @@
           <a:lstStyle/>
           <a:p>
             <a:pPr algn="ctr"/>
+            <a:endParaRPr/>
           </a:p>
         </p:txBody>
       </p:sp>
@@ -4474,6 +4502,7 @@
           <a:lstStyle/>
           <a:p>
             <a:pPr algn="ctr"/>
+            <a:endParaRPr/>
           </a:p>
         </p:txBody>
       </p:sp>
@@ -4927,6 +4956,7 @@
           <a:lstStyle/>
           <a:p>
             <a:pPr algn="ctr"/>
+            <a:endParaRPr/>
           </a:p>
         </p:txBody>
       </p:sp>
@@ -4954,7 +4984,7 @@
           <a:p>
             <a:pPr algn="l"/>
             <a:r>
-              <a:rPr sz="1100" b="1" i="0">
+              <a:rPr sz="1100" b="1" i="0" dirty="0">
                 <a:solidFill>
                   <a:srgbClr val="F59E0B"/>
                 </a:solidFill>
@@ -5006,6 +5036,7 @@
           <a:lstStyle/>
           <a:p>
             <a:pPr algn="ctr"/>
+            <a:endParaRPr/>
           </a:p>
         </p:txBody>
       </p:sp>
@@ -5052,7 +5083,7 @@
         <p:spPr>
           <a:xfrm>
             <a:off x="10369296" y="5440680"/>
-            <a:ext cx="2377440" cy="347472"/>
+            <a:ext cx="1261871" cy="347472"/>
           </a:xfrm>
           <a:prstGeom prst="rect">
             <a:avLst/>
@@ -5085,6 +5116,7 @@
           <a:lstStyle/>
           <a:p>
             <a:pPr algn="ctr"/>
+            <a:endParaRPr/>
           </a:p>
         </p:txBody>
       </p:sp>
@@ -5097,7 +5129,7 @@
         <p:spPr>
           <a:xfrm>
             <a:off x="10479024" y="5477256"/>
-            <a:ext cx="2157984" cy="347472"/>
+            <a:ext cx="1408176" cy="261610"/>
           </a:xfrm>
           <a:prstGeom prst="rect">
             <a:avLst/>
@@ -5131,7 +5163,7 @@
 </file>
 
 <file path=ppt/slides/slide4.xml><?xml version="1.0" encoding="utf-8"?>
-<p:sld xmlns:a="http://schemas.openxmlformats.org/drawingml/2006/main" xmlns:p="http://schemas.openxmlformats.org/presentationml/2006/main" xmlns:r="http://schemas.openxmlformats.org/officeDocument/2006/relationships">
+<p:sld xmlns:a="http://schemas.openxmlformats.org/drawingml/2006/main" xmlns:r="http://schemas.openxmlformats.org/officeDocument/2006/relationships" xmlns:p="http://schemas.openxmlformats.org/presentationml/2006/main">
   <p:cSld>
     <p:bg>
       <p:bgPr>
@@ -5147,7 +5179,14 @@
         <p:cNvGrpSpPr/>
         <p:nvPr/>
       </p:nvGrpSpPr>
-      <p:grpSpPr/>
+      <p:grpSpPr>
+        <a:xfrm>
+          <a:off x="0" y="0"/>
+          <a:ext cx="0" cy="0"/>
+          <a:chOff x="0" y="0"/>
+          <a:chExt cx="0" cy="0"/>
+        </a:xfrm>
+      </p:grpSpPr>
       <p:sp>
         <p:nvSpPr>
           <p:cNvPr id="2" name="TextBox 1"/>
@@ -5222,6 +5261,7 @@
           <a:lstStyle/>
           <a:p>
             <a:pPr algn="ctr"/>
+            <a:endParaRPr/>
           </a:p>
         </p:txBody>
       </p:sp>
@@ -5301,6 +5341,7 @@
           <a:lstStyle/>
           <a:p>
             <a:pPr algn="ctr"/>
+            <a:endParaRPr/>
           </a:p>
         </p:txBody>
       </p:sp>
@@ -5379,6 +5420,7 @@
           <a:lstStyle/>
           <a:p>
             <a:pPr algn="ctr"/>
+            <a:endParaRPr/>
           </a:p>
         </p:txBody>
       </p:sp>
@@ -5832,6 +5874,7 @@
           <a:lstStyle/>
           <a:p>
             <a:pPr algn="ctr"/>
+            <a:endParaRPr/>
           </a:p>
         </p:txBody>
       </p:sp>
@@ -5911,6 +5954,7 @@
           <a:lstStyle/>
           <a:p>
             <a:pPr algn="ctr"/>
+            <a:endParaRPr/>
           </a:p>
         </p:txBody>
       </p:sp>
@@ -5990,6 +6034,7 @@
           <a:lstStyle/>
           <a:p>
             <a:pPr algn="ctr"/>
+            <a:endParaRPr/>
           </a:p>
         </p:txBody>
       </p:sp>
@@ -6036,7 +6081,7 @@
 </file>
 
 <file path=ppt/slides/slide5.xml><?xml version="1.0" encoding="utf-8"?>
-<p:sld xmlns:a="http://schemas.openxmlformats.org/drawingml/2006/main" xmlns:p="http://schemas.openxmlformats.org/presentationml/2006/main" xmlns:r="http://schemas.openxmlformats.org/officeDocument/2006/relationships">
+<p:sld xmlns:a="http://schemas.openxmlformats.org/drawingml/2006/main" xmlns:r="http://schemas.openxmlformats.org/officeDocument/2006/relationships" xmlns:p="http://schemas.openxmlformats.org/presentationml/2006/main">
   <p:cSld>
     <p:bg>
       <p:bgPr>
@@ -6052,7 +6097,14 @@
         <p:cNvGrpSpPr/>
         <p:nvPr/>
       </p:nvGrpSpPr>
-      <p:grpSpPr/>
+      <p:grpSpPr>
+        <a:xfrm>
+          <a:off x="0" y="0"/>
+          <a:ext cx="0" cy="0"/>
+          <a:chOff x="0" y="0"/>
+          <a:chExt cx="0" cy="0"/>
+        </a:xfrm>
+      </p:grpSpPr>
       <p:sp>
         <p:nvSpPr>
           <p:cNvPr id="2" name="TextBox 1"/>
@@ -6127,6 +6179,7 @@
           <a:lstStyle/>
           <a:p>
             <a:pPr algn="ctr"/>
+            <a:endParaRPr/>
           </a:p>
         </p:txBody>
       </p:sp>
@@ -6206,6 +6259,7 @@
           <a:lstStyle/>
           <a:p>
             <a:pPr algn="ctr"/>
+            <a:endParaRPr/>
           </a:p>
         </p:txBody>
       </p:sp>
@@ -6284,6 +6338,7 @@
           <a:lstStyle/>
           <a:p>
             <a:pPr algn="ctr"/>
+            <a:endParaRPr/>
           </a:p>
         </p:txBody>
       </p:sp>
@@ -6737,6 +6792,7 @@
           <a:lstStyle/>
           <a:p>
             <a:pPr algn="ctr"/>
+            <a:endParaRPr/>
           </a:p>
         </p:txBody>
       </p:sp>
@@ -6816,6 +6872,7 @@
           <a:lstStyle/>
           <a:p>
             <a:pPr algn="ctr"/>
+            <a:endParaRPr/>
           </a:p>
         </p:txBody>
       </p:sp>
@@ -6895,6 +6952,7 @@
           <a:lstStyle/>
           <a:p>
             <a:pPr algn="ctr"/>
+            <a:endParaRPr/>
           </a:p>
         </p:txBody>
       </p:sp>
@@ -6941,7 +6999,7 @@
 </file>
 
 <file path=ppt/slides/slide6.xml><?xml version="1.0" encoding="utf-8"?>
-<p:sld xmlns:a="http://schemas.openxmlformats.org/drawingml/2006/main" xmlns:p="http://schemas.openxmlformats.org/presentationml/2006/main" xmlns:r="http://schemas.openxmlformats.org/officeDocument/2006/relationships">
+<p:sld xmlns:a="http://schemas.openxmlformats.org/drawingml/2006/main" xmlns:r="http://schemas.openxmlformats.org/officeDocument/2006/relationships" xmlns:p="http://schemas.openxmlformats.org/presentationml/2006/main">
   <p:cSld>
     <p:bg>
       <p:bgPr>
@@ -6957,7 +7015,14 @@
         <p:cNvGrpSpPr/>
         <p:nvPr/>
       </p:nvGrpSpPr>
-      <p:grpSpPr/>
+      <p:grpSpPr>
+        <a:xfrm>
+          <a:off x="0" y="0"/>
+          <a:ext cx="0" cy="0"/>
+          <a:chOff x="0" y="0"/>
+          <a:chExt cx="0" cy="0"/>
+        </a:xfrm>
+      </p:grpSpPr>
       <p:sp>
         <p:nvSpPr>
           <p:cNvPr id="2" name="TextBox 1"/>
@@ -7032,6 +7097,7 @@
           <a:lstStyle/>
           <a:p>
             <a:pPr algn="ctr"/>
+            <a:endParaRPr/>
           </a:p>
         </p:txBody>
       </p:sp>
@@ -7111,6 +7177,7 @@
           <a:lstStyle/>
           <a:p>
             <a:pPr algn="ctr"/>
+            <a:endParaRPr/>
           </a:p>
         </p:txBody>
       </p:sp>
@@ -7189,6 +7256,7 @@
           <a:lstStyle/>
           <a:p>
             <a:pPr algn="ctr"/>
+            <a:endParaRPr/>
           </a:p>
         </p:txBody>
       </p:sp>
@@ -7642,6 +7710,7 @@
           <a:lstStyle/>
           <a:p>
             <a:pPr algn="ctr"/>
+            <a:endParaRPr/>
           </a:p>
         </p:txBody>
       </p:sp>
@@ -7721,6 +7790,7 @@
           <a:lstStyle/>
           <a:p>
             <a:pPr algn="ctr"/>
+            <a:endParaRPr/>
           </a:p>
         </p:txBody>
       </p:sp>
@@ -7800,6 +7870,7 @@
           <a:lstStyle/>
           <a:p>
             <a:pPr algn="ctr"/>
+            <a:endParaRPr/>
           </a:p>
         </p:txBody>
       </p:sp>
@@ -7846,7 +7917,7 @@
 </file>
 
 <file path=ppt/slides/slide7.xml><?xml version="1.0" encoding="utf-8"?>
-<p:sld xmlns:a="http://schemas.openxmlformats.org/drawingml/2006/main" xmlns:p="http://schemas.openxmlformats.org/presentationml/2006/main" xmlns:r="http://schemas.openxmlformats.org/officeDocument/2006/relationships">
+<p:sld xmlns:a="http://schemas.openxmlformats.org/drawingml/2006/main" xmlns:r="http://schemas.openxmlformats.org/officeDocument/2006/relationships" xmlns:p="http://schemas.openxmlformats.org/presentationml/2006/main">
   <p:cSld>
     <p:bg>
       <p:bgPr>
@@ -7862,7 +7933,14 @@
         <p:cNvGrpSpPr/>
         <p:nvPr/>
       </p:nvGrpSpPr>
-      <p:grpSpPr/>
+      <p:grpSpPr>
+        <a:xfrm>
+          <a:off x="0" y="0"/>
+          <a:ext cx="0" cy="0"/>
+          <a:chOff x="0" y="0"/>
+          <a:chExt cx="0" cy="0"/>
+        </a:xfrm>
+      </p:grpSpPr>
       <p:sp>
         <p:nvSpPr>
           <p:cNvPr id="2" name="TextBox 1"/>
@@ -7937,6 +8015,7 @@
           <a:lstStyle/>
           <a:p>
             <a:pPr algn="ctr"/>
+            <a:endParaRPr/>
           </a:p>
         </p:txBody>
       </p:sp>
@@ -8014,6 +8093,7 @@
           <a:lstStyle/>
           <a:p>
             <a:pPr algn="ctr"/>
+            <a:endParaRPr/>
           </a:p>
         </p:txBody>
       </p:sp>
@@ -8091,6 +8171,7 @@
           <a:lstStyle/>
           <a:p>
             <a:pPr algn="ctr"/>
+            <a:endParaRPr/>
           </a:p>
         </p:txBody>
       </p:sp>
@@ -8474,6 +8555,7 @@
           <a:lstStyle/>
           <a:p>
             <a:pPr algn="ctr"/>
+            <a:endParaRPr/>
           </a:p>
         </p:txBody>
       </p:sp>
@@ -8551,6 +8633,7 @@
           <a:lstStyle/>
           <a:p>
             <a:pPr algn="ctr"/>
+            <a:endParaRPr/>
           </a:p>
         </p:txBody>
       </p:sp>
@@ -8903,7 +8986,7 @@
 </file>
 
 <file path=ppt/slides/slide8.xml><?xml version="1.0" encoding="utf-8"?>
-<p:sld xmlns:a="http://schemas.openxmlformats.org/drawingml/2006/main" xmlns:p="http://schemas.openxmlformats.org/presentationml/2006/main" xmlns:r="http://schemas.openxmlformats.org/officeDocument/2006/relationships">
+<p:sld xmlns:a="http://schemas.openxmlformats.org/drawingml/2006/main" xmlns:r="http://schemas.openxmlformats.org/officeDocument/2006/relationships" xmlns:p="http://schemas.openxmlformats.org/presentationml/2006/main">
   <p:cSld>
     <p:bg>
       <p:bgPr>
@@ -8919,7 +9002,14 @@
         <p:cNvGrpSpPr/>
         <p:nvPr/>
       </p:nvGrpSpPr>
-      <p:grpSpPr/>
+      <p:grpSpPr>
+        <a:xfrm>
+          <a:off x="0" y="0"/>
+          <a:ext cx="0" cy="0"/>
+          <a:chOff x="0" y="0"/>
+          <a:chExt cx="0" cy="0"/>
+        </a:xfrm>
+      </p:grpSpPr>
       <p:sp>
         <p:nvSpPr>
           <p:cNvPr id="2" name="Rectangle 1"/>
@@ -8960,6 +9050,7 @@
           <a:lstStyle/>
           <a:p>
             <a:pPr algn="ctr"/>
+            <a:endParaRPr/>
           </a:p>
         </p:txBody>
       </p:sp>
@@ -9071,6 +9162,7 @@
           <a:lstStyle/>
           <a:p>
             <a:pPr algn="ctr"/>
+            <a:endParaRPr/>
           </a:p>
         </p:txBody>
       </p:sp>
